--- a/docs/営業改革_運用指南書_説明資料.pptx
+++ b/docs/営業改革_運用指南書_説明資料.pptx
@@ -4046,7 +4046,7 @@
                           <a:ea typeface="Yu Gothic"/>
                           <a:cs typeface="Yu Gothic"/>
                         </a:rPr>
-                        <a:t>STO日次15分（小澤・坪井）／宿題チェック10分</a:t>
+                        <a:t>STO日次15分（小沢・坪井）／宿題チェック10分</a:t>
                       </a:r>
                     </a:p>
                   </a:txBody>
@@ -4106,7 +4106,7 @@
                           <a:ea typeface="Yu Gothic"/>
                           <a:cs typeface="Yu Gothic"/>
                         </a:rPr>
-                        <a:t>坪井：マスター週次更新／小澤：論点の質の確認</a:t>
+                        <a:t>坪井：マスター週次更新／小沢：論点の質の確認</a:t>
                       </a:r>
                     </a:p>
                   </a:txBody>
@@ -9455,7 +9455,7 @@
                           <a:ea typeface="Yu Gothic"/>
                           <a:cs typeface="Yu Gothic"/>
                         </a:rPr>
-                        <a:t>小澤さん（変革設計リード）</a:t>
+                        <a:t>小沢さん（変革設計リード）</a:t>
                       </a:r>
                     </a:p>
                   </a:txBody>
@@ -14057,7 +14057,7 @@
                 <a:ea typeface="Yu Gothic"/>
                 <a:cs typeface="Yu Gothic"/>
               </a:rPr>
-              <a:t>小澤さん（変革設計リード）</a:t>
+              <a:t>小沢さん（変革設計リード）</a:t>
             </a:r>
           </a:p>
         </p:txBody>
@@ -14570,7 +14570,7 @@
                 <a:ea typeface="Yu Gothic"/>
                 <a:cs typeface="Yu Gothic"/>
               </a:rPr>
-              <a:t>一人が作り、もう一人がレビューする（設計＝小澤／数字検証＝坪井）。共同編集は常態化させない</a:t>
+              <a:t>一人が作り、もう一人がレビューする（設計＝小沢／数字検証＝坪井）。共同編集は常態化させない</a:t>
             </a:r>
           </a:p>
         </p:txBody>

--- a/docs/営業改革_運用指南書_説明資料.pptx
+++ b/docs/営業改革_運用指南書_説明資料.pptx
@@ -7952,7 +7952,7 @@
                 <a:ea typeface="Yu Gothic"/>
                 <a:cs typeface="Yu Gothic"/>
               </a:rPr>
-              <a:t>専任2名の負荷は限界に近づいていないか ／ 増員トリガー3条件に接近していないか</a:t>
+              <a:t>小沢さん・坪井さんの負荷は限界に近づいていないか（坪井さんは兼務枠内か）／ 増員トリガー3条件に接近していないか</a:t>
             </a:r>
           </a:p>
         </p:txBody>
